--- a/activity/M01A00/graph/Graph.pptx
+++ b/activity/M01A00/graph/Graph.pptx
@@ -261,7 +261,7 @@
           <a:p>
             <a:fld id="{992110D5-12A4-47CE-AEA1-C085FAB6CCD2}" type="datetimeFigureOut">
               <a:rPr lang="es-CO" smtClean="0"/>
-              <a:t>20/08/2024</a:t>
+              <a:t>20/08/2025</a:t>
             </a:fld>
             <a:endParaRPr lang="es-CO"/>
           </a:p>
@@ -461,7 +461,7 @@
           <a:p>
             <a:fld id="{992110D5-12A4-47CE-AEA1-C085FAB6CCD2}" type="datetimeFigureOut">
               <a:rPr lang="es-CO" smtClean="0"/>
-              <a:t>20/08/2024</a:t>
+              <a:t>20/08/2025</a:t>
             </a:fld>
             <a:endParaRPr lang="es-CO"/>
           </a:p>
@@ -671,7 +671,7 @@
           <a:p>
             <a:fld id="{992110D5-12A4-47CE-AEA1-C085FAB6CCD2}" type="datetimeFigureOut">
               <a:rPr lang="es-CO" smtClean="0"/>
-              <a:t>20/08/2024</a:t>
+              <a:t>20/08/2025</a:t>
             </a:fld>
             <a:endParaRPr lang="es-CO"/>
           </a:p>
@@ -871,7 +871,7 @@
           <a:p>
             <a:fld id="{992110D5-12A4-47CE-AEA1-C085FAB6CCD2}" type="datetimeFigureOut">
               <a:rPr lang="es-CO" smtClean="0"/>
-              <a:t>20/08/2024</a:t>
+              <a:t>20/08/2025</a:t>
             </a:fld>
             <a:endParaRPr lang="es-CO"/>
           </a:p>
@@ -1147,7 +1147,7 @@
           <a:p>
             <a:fld id="{992110D5-12A4-47CE-AEA1-C085FAB6CCD2}" type="datetimeFigureOut">
               <a:rPr lang="es-CO" smtClean="0"/>
-              <a:t>20/08/2024</a:t>
+              <a:t>20/08/2025</a:t>
             </a:fld>
             <a:endParaRPr lang="es-CO"/>
           </a:p>
@@ -1415,7 +1415,7 @@
           <a:p>
             <a:fld id="{992110D5-12A4-47CE-AEA1-C085FAB6CCD2}" type="datetimeFigureOut">
               <a:rPr lang="es-CO" smtClean="0"/>
-              <a:t>20/08/2024</a:t>
+              <a:t>20/08/2025</a:t>
             </a:fld>
             <a:endParaRPr lang="es-CO"/>
           </a:p>
@@ -1830,7 +1830,7 @@
           <a:p>
             <a:fld id="{992110D5-12A4-47CE-AEA1-C085FAB6CCD2}" type="datetimeFigureOut">
               <a:rPr lang="es-CO" smtClean="0"/>
-              <a:t>20/08/2024</a:t>
+              <a:t>20/08/2025</a:t>
             </a:fld>
             <a:endParaRPr lang="es-CO"/>
           </a:p>
@@ -1972,7 +1972,7 @@
           <a:p>
             <a:fld id="{992110D5-12A4-47CE-AEA1-C085FAB6CCD2}" type="datetimeFigureOut">
               <a:rPr lang="es-CO" smtClean="0"/>
-              <a:t>20/08/2024</a:t>
+              <a:t>20/08/2025</a:t>
             </a:fld>
             <a:endParaRPr lang="es-CO"/>
           </a:p>
@@ -2085,7 +2085,7 @@
           <a:p>
             <a:fld id="{992110D5-12A4-47CE-AEA1-C085FAB6CCD2}" type="datetimeFigureOut">
               <a:rPr lang="es-CO" smtClean="0"/>
-              <a:t>20/08/2024</a:t>
+              <a:t>20/08/2025</a:t>
             </a:fld>
             <a:endParaRPr lang="es-CO"/>
           </a:p>
@@ -2398,7 +2398,7 @@
           <a:p>
             <a:fld id="{992110D5-12A4-47CE-AEA1-C085FAB6CCD2}" type="datetimeFigureOut">
               <a:rPr lang="es-CO" smtClean="0"/>
-              <a:t>20/08/2024</a:t>
+              <a:t>20/08/2025</a:t>
             </a:fld>
             <a:endParaRPr lang="es-CO"/>
           </a:p>
@@ -2687,7 +2687,7 @@
           <a:p>
             <a:fld id="{992110D5-12A4-47CE-AEA1-C085FAB6CCD2}" type="datetimeFigureOut">
               <a:rPr lang="es-CO" smtClean="0"/>
-              <a:t>20/08/2024</a:t>
+              <a:t>20/08/2025</a:t>
             </a:fld>
             <a:endParaRPr lang="es-CO"/>
           </a:p>
@@ -2930,7 +2930,7 @@
           <a:p>
             <a:fld id="{992110D5-12A4-47CE-AEA1-C085FAB6CCD2}" type="datetimeFigureOut">
               <a:rPr lang="es-CO" smtClean="0"/>
-              <a:t>20/08/2024</a:t>
+              <a:t>20/08/2025</a:t>
             </a:fld>
             <a:endParaRPr lang="es-CO"/>
           </a:p>
@@ -3369,17 +3369,13 @@
           </a:prstGeom>
           <a:blipFill>
             <a:blip r:embed="rId2">
-              <a:extLst>
-                <a:ext uri="{BEBA8EAE-BF5A-486C-A8C5-ECC9F3942E4B}">
-                  <a14:imgProps xmlns:a14="http://schemas.microsoft.com/office/drawing/2010/main">
-                    <a14:imgLayer r:embed="rId3">
-                      <a14:imgEffect>
-                        <a14:saturation sat="0"/>
-                      </a14:imgEffect>
-                    </a14:imgLayer>
-                  </a14:imgProps>
-                </a:ext>
-              </a:extLst>
+              <a:duotone>
+                <a:prstClr val="black"/>
+                <a:schemeClr val="tx2">
+                  <a:tint val="45000"/>
+                  <a:satMod val="400000"/>
+                </a:schemeClr>
+              </a:duotone>
             </a:blip>
             <a:stretch>
               <a:fillRect/>
